--- a/Documentation/Slides/Week_21.pptx
+++ b/Documentation/Slides/Week_21.pptx
@@ -5,42 +5,48 @@
     <p:sldMasterId id="2147483648" r:id="rId4"/>
   </p:sldMasterIdLst>
   <p:notesMasterIdLst>
-    <p:notesMasterId r:id="rId9"/>
+    <p:notesMasterId r:id="rId15"/>
   </p:notesMasterIdLst>
   <p:sldIdLst>
     <p:sldId id="267" r:id="rId5"/>
     <p:sldId id="279" r:id="rId6"/>
-    <p:sldId id="299" r:id="rId7"/>
-    <p:sldId id="277" r:id="rId8"/>
+    <p:sldId id="301" r:id="rId7"/>
+    <p:sldId id="303" r:id="rId8"/>
+    <p:sldId id="302" r:id="rId9"/>
+    <p:sldId id="305" r:id="rId10"/>
+    <p:sldId id="307" r:id="rId11"/>
+    <p:sldId id="299" r:id="rId12"/>
+    <p:sldId id="300" r:id="rId13"/>
+    <p:sldId id="277" r:id="rId14"/>
   </p:sldIdLst>
   <p:sldSz cx="9144000" cy="6858000" type="screen4x3"/>
   <p:notesSz cx="6858000" cy="9144000"/>
   <p:embeddedFontLst>
     <p:embeddedFont>
-      <p:font typeface="Acumin Pro Condensed Semibold" panose="020B0706020202020204"/>
-      <p:regular r:id="rId10"/>
-      <p:bold r:id="rId11"/>
-      <p:italic r:id="rId12"/>
-      <p:boldItalic r:id="rId13"/>
+      <p:font typeface="Acumin Pro Condensed Semibold" panose="020B0706020202020204" pitchFamily="34" charset="77"/>
+      <p:regular r:id="rId16"/>
+      <p:bold r:id="rId17"/>
+      <p:italic r:id="rId18"/>
+      <p:boldItalic r:id="rId19"/>
     </p:embeddedFont>
     <p:embeddedFont>
       <p:font typeface="Acumin Pro Medium" panose="020B0604020202020204" pitchFamily="34" charset="77"/>
-      <p:regular r:id="rId14"/>
-      <p:italic r:id="rId15"/>
+      <p:regular r:id="rId20"/>
+      <p:italic r:id="rId21"/>
     </p:embeddedFont>
     <p:embeddedFont>
       <p:font typeface="Franklin Gothic Book" panose="020B0503020102020204" pitchFamily="34" charset="0"/>
-      <p:regular r:id="rId16"/>
-      <p:italic r:id="rId17"/>
+      <p:regular r:id="rId22"/>
+      <p:italic r:id="rId23"/>
     </p:embeddedFont>
     <p:embeddedFont>
       <p:font typeface="Franklin Gothic Medium" panose="020B0603020102020204" pitchFamily="34" charset="0"/>
-      <p:regular r:id="rId18"/>
-      <p:italic r:id="rId19"/>
+      <p:regular r:id="rId24"/>
+      <p:italic r:id="rId25"/>
     </p:embeddedFont>
     <p:embeddedFont>
       <p:font typeface="Franklin Gothic Medium Cond" panose="020B0606030402020204" pitchFamily="34" charset="0"/>
-      <p:regular r:id="rId20"/>
+      <p:regular r:id="rId26"/>
     </p:embeddedFont>
   </p:embeddedFontLst>
   <p:defaultTextStyle>
@@ -245,7 +251,7 @@
           <a:p>
             <a:fld id="{01926CF7-48D8-2F46-AFC8-8A5D2298DFDD}" type="datetimeFigureOut">
               <a:rPr lang="en-US" smtClean="0"/>
-              <a:t>2/6/26</a:t>
+              <a:t>2/9/26</a:t>
             </a:fld>
             <a:endParaRPr lang="en-US"/>
           </a:p>
@@ -793,7 +799,7 @@
           <a:p>
             <a:fld id="{237BF745-0557-B241-863F-056113C7032A}" type="slidenum">
               <a:rPr lang="en-US" smtClean="0"/>
-              <a:t>3</a:t>
+              <a:t>8</a:t>
             </a:fld>
             <a:endParaRPr lang="en-US"/>
           </a:p>
@@ -13713,11 +13719,14 @@
           <a:lstStyle/>
           <a:p>
             <a:r>
-              <a:rPr lang="en-US" b="1" dirty="0">
+              <a:rPr lang="en-US" b="1">
                 <a:latin typeface="Acumin Pro Condensed Semibold" panose="020B0506020202020204" pitchFamily="34" charset="77"/>
               </a:rPr>
-              <a:t>Week 4</a:t>
-            </a:r>
+              <a:t>Week 6</a:t>
+            </a:r>
+            <a:endParaRPr lang="en-US" b="1" dirty="0">
+              <a:latin typeface="Acumin Pro Condensed Semibold" panose="020B0506020202020204" pitchFamily="34" charset="77"/>
+            </a:endParaRPr>
           </a:p>
         </p:txBody>
       </p:sp>
@@ -13776,7 +13785,7 @@
           <a:p>
             <a:r>
               <a:rPr lang="en-US" dirty="0"/>
-              <a:t>02/06/26</a:t>
+              <a:t>02/09/26</a:t>
             </a:r>
           </a:p>
         </p:txBody>
@@ -13785,6 +13794,94 @@
     <p:extLst>
       <p:ext uri="{BB962C8B-B14F-4D97-AF65-F5344CB8AC3E}">
         <p14:creationId xmlns:p14="http://schemas.microsoft.com/office/powerpoint/2010/main" val="4154997097"/>
+      </p:ext>
+    </p:extLst>
+  </p:cSld>
+  <p:clrMapOvr>
+    <a:masterClrMapping/>
+  </p:clrMapOvr>
+</p:sld>
+</file>
+
+<file path=ppt/slides/slide10.xml><?xml version="1.0" encoding="utf-8"?>
+<p:sld xmlns:a="http://schemas.openxmlformats.org/drawingml/2006/main" xmlns:r="http://schemas.openxmlformats.org/officeDocument/2006/relationships" xmlns:p="http://schemas.openxmlformats.org/presentationml/2006/main">
+  <p:cSld>
+    <p:spTree>
+      <p:nvGrpSpPr>
+        <p:cNvPr id="1" name=""/>
+        <p:cNvGrpSpPr/>
+        <p:nvPr/>
+      </p:nvGrpSpPr>
+      <p:grpSpPr>
+        <a:xfrm>
+          <a:off x="0" y="0"/>
+          <a:ext cx="0" cy="0"/>
+          <a:chOff x="0" y="0"/>
+          <a:chExt cx="0" cy="0"/>
+        </a:xfrm>
+      </p:grpSpPr>
+      <p:sp>
+        <p:nvSpPr>
+          <p:cNvPr id="2" name="Title 1">
+            <a:extLst>
+              <a:ext uri="{FF2B5EF4-FFF2-40B4-BE49-F238E27FC236}">
+                <a16:creationId xmlns:a16="http://schemas.microsoft.com/office/drawing/2014/main" id="{E4E72CBA-026F-7E96-546F-23B8813A83DA}"/>
+              </a:ext>
+            </a:extLst>
+          </p:cNvPr>
+          <p:cNvSpPr>
+            <a:spLocks noGrp="1"/>
+          </p:cNvSpPr>
+          <p:nvPr>
+            <p:ph type="title"/>
+          </p:nvPr>
+        </p:nvSpPr>
+        <p:spPr/>
+        <p:txBody>
+          <a:bodyPr/>
+          <a:lstStyle/>
+          <a:p>
+            <a:r>
+              <a:rPr lang="en-US" dirty="0"/>
+              <a:t>Thank You</a:t>
+            </a:r>
+          </a:p>
+        </p:txBody>
+      </p:sp>
+      <p:sp>
+        <p:nvSpPr>
+          <p:cNvPr id="3" name="Text Placeholder 2">
+            <a:extLst>
+              <a:ext uri="{FF2B5EF4-FFF2-40B4-BE49-F238E27FC236}">
+                <a16:creationId xmlns:a16="http://schemas.microsoft.com/office/drawing/2014/main" id="{CE8FBDCD-BC38-D4A8-A210-EA02F2610057}"/>
+              </a:ext>
+            </a:extLst>
+          </p:cNvPr>
+          <p:cNvSpPr>
+            <a:spLocks noGrp="1"/>
+          </p:cNvSpPr>
+          <p:nvPr>
+            <p:ph type="body" sz="quarter" idx="10"/>
+          </p:nvPr>
+        </p:nvSpPr>
+        <p:spPr/>
+        <p:txBody>
+          <a:bodyPr>
+            <a:normAutofit/>
+          </a:bodyPr>
+          <a:lstStyle/>
+          <a:p>
+            <a:r>
+              <a:rPr lang="en-US" dirty="0"/>
+              <a:t>Purdue Polytechnic Institute</a:t>
+            </a:r>
+          </a:p>
+        </p:txBody>
+      </p:sp>
+    </p:spTree>
+    <p:extLst>
+      <p:ext uri="{BB962C8B-B14F-4D97-AF65-F5344CB8AC3E}">
+        <p14:creationId xmlns:p14="http://schemas.microsoft.com/office/powerpoint/2010/main" val="3555266232"/>
       </p:ext>
     </p:extLst>
   </p:cSld>
@@ -13864,6 +13961,100 @@
               <a:buFont typeface="Arial" panose="020B0604020202020204" pitchFamily="34" charset="0"/>
               <a:buChar char="•"/>
             </a:pPr>
+            <a:r>
+              <a:rPr lang="en-US" dirty="0"/>
+              <a:t>Furthered Data Analysis of IMU</a:t>
+            </a:r>
+          </a:p>
+          <a:p>
+            <a:pPr marL="628650" lvl="1" indent="-285750">
+              <a:buFont typeface="Arial" panose="020B0604020202020204" pitchFamily="34" charset="0"/>
+              <a:buChar char="•"/>
+            </a:pPr>
+            <a:r>
+              <a:rPr lang="en-US" dirty="0"/>
+              <a:t>New Study Conducted</a:t>
+            </a:r>
+          </a:p>
+          <a:p>
+            <a:pPr marL="628650" lvl="1" indent="-285750">
+              <a:buFont typeface="Arial" panose="020B0604020202020204" pitchFamily="34" charset="0"/>
+              <a:buChar char="•"/>
+            </a:pPr>
+            <a:r>
+              <a:rPr lang="en-US" dirty="0"/>
+              <a:t>Verification Successful</a:t>
+            </a:r>
+          </a:p>
+          <a:p>
+            <a:pPr marL="285750" indent="-285750">
+              <a:buFont typeface="Arial" panose="020B0604020202020204" pitchFamily="34" charset="0"/>
+              <a:buChar char="•"/>
+            </a:pPr>
+            <a:r>
+              <a:rPr lang="en-US" dirty="0"/>
+              <a:t>Research on RF to DC Converters</a:t>
+            </a:r>
+          </a:p>
+          <a:p>
+            <a:pPr marL="628650" lvl="1" indent="-285750">
+              <a:buFont typeface="Arial" panose="020B0604020202020204" pitchFamily="34" charset="0"/>
+              <a:buChar char="•"/>
+            </a:pPr>
+            <a:r>
+              <a:rPr lang="en-US" dirty="0"/>
+              <a:t>915 MHz Band Research Paper</a:t>
+            </a:r>
+          </a:p>
+          <a:p>
+            <a:pPr marL="285750" indent="-285750">
+              <a:buFont typeface="Arial" panose="020B0604020202020204" pitchFamily="34" charset="0"/>
+              <a:buChar char="•"/>
+            </a:pPr>
+            <a:r>
+              <a:rPr lang="en-US" dirty="0" err="1"/>
+              <a:t>DigiKey</a:t>
+            </a:r>
+            <a:r>
+              <a:rPr lang="en-US" dirty="0"/>
+              <a:t> Parts Ordering</a:t>
+            </a:r>
+          </a:p>
+          <a:p>
+            <a:pPr marL="628650" lvl="1" indent="-285750">
+              <a:buFont typeface="Arial" panose="020B0604020202020204" pitchFamily="34" charset="0"/>
+              <a:buChar char="•"/>
+            </a:pPr>
+            <a:r>
+              <a:rPr lang="en-US" dirty="0"/>
+              <a:t>Parts List Curated – F Number Required (Procurement Office)</a:t>
+            </a:r>
+          </a:p>
+          <a:p>
+            <a:pPr marL="285750" indent="-285750">
+              <a:buFont typeface="Arial" panose="020B0604020202020204" pitchFamily="34" charset="0"/>
+              <a:buChar char="•"/>
+            </a:pPr>
+            <a:r>
+              <a:rPr lang="en-US" dirty="0"/>
+              <a:t>Agriculture Components</a:t>
+            </a:r>
+          </a:p>
+          <a:p>
+            <a:pPr marL="628650" lvl="1" indent="-285750">
+              <a:buFont typeface="Arial" panose="020B0604020202020204" pitchFamily="34" charset="0"/>
+              <a:buChar char="•"/>
+            </a:pPr>
+            <a:r>
+              <a:rPr lang="en-US" dirty="0"/>
+              <a:t>Sent electrical components needed for study to department</a:t>
+            </a:r>
+          </a:p>
+          <a:p>
+            <a:pPr marL="628650" lvl="1" indent="-285750">
+              <a:buFont typeface="Arial" panose="020B0604020202020204" pitchFamily="34" charset="0"/>
+              <a:buChar char="•"/>
+            </a:pPr>
             <a:endParaRPr lang="en-US" dirty="0"/>
           </a:p>
           <a:p>
@@ -13967,6 +14158,1283 @@
 </file>
 
 <file path=ppt/slides/slide3.xml><?xml version="1.0" encoding="utf-8"?>
+<p:sld xmlns:a="http://schemas.openxmlformats.org/drawingml/2006/main" xmlns:r="http://schemas.openxmlformats.org/officeDocument/2006/relationships" xmlns:p="http://schemas.openxmlformats.org/presentationml/2006/main">
+  <p:cSld>
+    <p:spTree>
+      <p:nvGrpSpPr>
+        <p:cNvPr id="1" name=""/>
+        <p:cNvGrpSpPr/>
+        <p:nvPr/>
+      </p:nvGrpSpPr>
+      <p:grpSpPr>
+        <a:xfrm>
+          <a:off x="0" y="0"/>
+          <a:ext cx="0" cy="0"/>
+          <a:chOff x="0" y="0"/>
+          <a:chExt cx="0" cy="0"/>
+        </a:xfrm>
+      </p:grpSpPr>
+      <p:sp>
+        <p:nvSpPr>
+          <p:cNvPr id="4" name="Title 3">
+            <a:extLst>
+              <a:ext uri="{FF2B5EF4-FFF2-40B4-BE49-F238E27FC236}">
+                <a16:creationId xmlns:a16="http://schemas.microsoft.com/office/drawing/2014/main" id="{CE8B44E8-4986-DF08-4A91-2D54D2DD4FBF}"/>
+              </a:ext>
+            </a:extLst>
+          </p:cNvPr>
+          <p:cNvSpPr>
+            <a:spLocks noGrp="1"/>
+          </p:cNvSpPr>
+          <p:nvPr>
+            <p:ph type="title"/>
+          </p:nvPr>
+        </p:nvSpPr>
+        <p:spPr>
+          <a:xfrm>
+            <a:off x="351064" y="385004"/>
+            <a:ext cx="8450036" cy="589032"/>
+          </a:xfrm>
+        </p:spPr>
+        <p:txBody>
+          <a:bodyPr anchor="ctr">
+            <a:normAutofit/>
+          </a:bodyPr>
+          <a:lstStyle/>
+          <a:p>
+            <a:r>
+              <a:rPr lang="en-US" dirty="0"/>
+              <a:t>Furthered Data Analysis of IMU</a:t>
+            </a:r>
+          </a:p>
+        </p:txBody>
+      </p:sp>
+      <p:sp>
+        <p:nvSpPr>
+          <p:cNvPr id="3" name="Text Placeholder 2">
+            <a:extLst>
+              <a:ext uri="{FF2B5EF4-FFF2-40B4-BE49-F238E27FC236}">
+                <a16:creationId xmlns:a16="http://schemas.microsoft.com/office/drawing/2014/main" id="{B5DA3B7C-8DC0-5E27-C120-0AA572E3A951}"/>
+              </a:ext>
+            </a:extLst>
+          </p:cNvPr>
+          <p:cNvSpPr>
+            <a:spLocks noGrp="1"/>
+          </p:cNvSpPr>
+          <p:nvPr>
+            <p:ph idx="12"/>
+          </p:nvPr>
+        </p:nvSpPr>
+        <p:spPr>
+          <a:xfrm>
+            <a:off x="351065" y="1543324"/>
+            <a:ext cx="4059877" cy="4390338"/>
+          </a:xfrm>
+        </p:spPr>
+        <p:txBody>
+          <a:bodyPr>
+            <a:normAutofit/>
+          </a:bodyPr>
+          <a:lstStyle/>
+          <a:p>
+            <a:pPr marL="285750" indent="-285750">
+              <a:buFont typeface="Arial" panose="020B0604020202020204" pitchFamily="34" charset="0"/>
+              <a:buChar char="•"/>
+            </a:pPr>
+            <a:r>
+              <a:rPr lang="en-US" dirty="0"/>
+              <a:t>Ran study for longer period of time ~60 minutes</a:t>
+            </a:r>
+          </a:p>
+          <a:p>
+            <a:pPr marL="285750" indent="-285750">
+              <a:buFont typeface="Arial" panose="020B0604020202020204" pitchFamily="34" charset="0"/>
+              <a:buChar char="•"/>
+            </a:pPr>
+            <a:r>
+              <a:rPr lang="en-US" dirty="0"/>
+              <a:t>Results were very similar (next slide)</a:t>
+            </a:r>
+          </a:p>
+          <a:p>
+            <a:pPr marL="285750" indent="-285750">
+              <a:buFont typeface="Arial" panose="020B0604020202020204" pitchFamily="34" charset="0"/>
+              <a:buChar char="•"/>
+            </a:pPr>
+            <a:r>
+              <a:rPr lang="en-US" dirty="0"/>
+              <a:t>Data analysis was done with the following Python script</a:t>
+            </a:r>
+          </a:p>
+        </p:txBody>
+      </p:sp>
+      <p:pic>
+        <p:nvPicPr>
+          <p:cNvPr id="7" name="Picture 6" descr="A screen shot of a computer program&#10;&#10;AI-generated content may be incorrect.">
+            <a:extLst>
+              <a:ext uri="{FF2B5EF4-FFF2-40B4-BE49-F238E27FC236}">
+                <a16:creationId xmlns:a16="http://schemas.microsoft.com/office/drawing/2014/main" id="{341B5732-ABA8-2922-4273-67BCAFFBA636}"/>
+              </a:ext>
+            </a:extLst>
+          </p:cNvPr>
+          <p:cNvPicPr>
+            <a:picLocks noChangeAspect="1"/>
+          </p:cNvPicPr>
+          <p:nvPr/>
+        </p:nvPicPr>
+        <p:blipFill>
+          <a:blip r:embed="rId2"/>
+          <a:stretch>
+            <a:fillRect/>
+          </a:stretch>
+        </p:blipFill>
+        <p:spPr>
+          <a:xfrm>
+            <a:off x="4779857" y="1543324"/>
+            <a:ext cx="3973254" cy="4390338"/>
+          </a:xfrm>
+          <a:prstGeom prst="rect">
+            <a:avLst/>
+          </a:prstGeom>
+          <a:noFill/>
+        </p:spPr>
+      </p:pic>
+      <p:sp>
+        <p:nvSpPr>
+          <p:cNvPr id="2" name="Text Placeholder 1">
+            <a:extLst>
+              <a:ext uri="{FF2B5EF4-FFF2-40B4-BE49-F238E27FC236}">
+                <a16:creationId xmlns:a16="http://schemas.microsoft.com/office/drawing/2014/main" id="{AFF02A74-F9EA-4A1F-4331-B466EC5357EA}"/>
+              </a:ext>
+            </a:extLst>
+          </p:cNvPr>
+          <p:cNvSpPr>
+            <a:spLocks noGrp="1"/>
+          </p:cNvSpPr>
+          <p:nvPr>
+            <p:ph type="body" sz="quarter" idx="11"/>
+          </p:nvPr>
+        </p:nvSpPr>
+        <p:spPr>
+          <a:xfrm>
+            <a:off x="342900" y="954291"/>
+            <a:ext cx="8458200" cy="365760"/>
+          </a:xfrm>
+        </p:spPr>
+        <p:txBody>
+          <a:bodyPr>
+            <a:normAutofit lnSpcReduction="10000"/>
+          </a:bodyPr>
+          <a:lstStyle/>
+          <a:p>
+            <a:r>
+              <a:rPr lang="en-US" dirty="0"/>
+              <a:t>New Study Conducted</a:t>
+            </a:r>
+          </a:p>
+        </p:txBody>
+      </p:sp>
+      <p:sp>
+        <p:nvSpPr>
+          <p:cNvPr id="5" name="Footer Placeholder 4">
+            <a:extLst>
+              <a:ext uri="{FF2B5EF4-FFF2-40B4-BE49-F238E27FC236}">
+                <a16:creationId xmlns:a16="http://schemas.microsoft.com/office/drawing/2014/main" id="{6692F260-CBE5-DFD7-8826-BF3864FEB53F}"/>
+              </a:ext>
+            </a:extLst>
+          </p:cNvPr>
+          <p:cNvSpPr>
+            <a:spLocks noGrp="1"/>
+          </p:cNvSpPr>
+          <p:nvPr>
+            <p:ph type="ftr" sz="quarter" idx="14"/>
+          </p:nvPr>
+        </p:nvSpPr>
+        <p:spPr>
+          <a:xfrm>
+            <a:off x="7461174" y="6295058"/>
+            <a:ext cx="1339925" cy="323970"/>
+          </a:xfrm>
+        </p:spPr>
+        <p:txBody>
+          <a:bodyPr anchor="ctr">
+            <a:normAutofit/>
+          </a:bodyPr>
+          <a:lstStyle/>
+          <a:p>
+            <a:pPr algn="r">
+              <a:spcAft>
+                <a:spcPts val="600"/>
+              </a:spcAft>
+            </a:pPr>
+            <a:r>
+              <a:rPr lang="en-US" dirty="0"/>
+              <a:t>3/X</a:t>
+            </a:r>
+            <a:endParaRPr lang="en-US"/>
+          </a:p>
+        </p:txBody>
+      </p:sp>
+    </p:spTree>
+    <p:extLst>
+      <p:ext uri="{BB962C8B-B14F-4D97-AF65-F5344CB8AC3E}">
+        <p14:creationId xmlns:p14="http://schemas.microsoft.com/office/powerpoint/2010/main" val="1326970784"/>
+      </p:ext>
+    </p:extLst>
+  </p:cSld>
+  <p:clrMapOvr>
+    <a:masterClrMapping/>
+  </p:clrMapOvr>
+</p:sld>
+</file>
+
+<file path=ppt/slides/slide4.xml><?xml version="1.0" encoding="utf-8"?>
+<p:sld xmlns:a="http://schemas.openxmlformats.org/drawingml/2006/main" xmlns:r="http://schemas.openxmlformats.org/officeDocument/2006/relationships" xmlns:p="http://schemas.openxmlformats.org/presentationml/2006/main">
+  <p:cSld>
+    <p:spTree>
+      <p:nvGrpSpPr>
+        <p:cNvPr id="1" name="">
+          <a:extLst>
+            <a:ext uri="{FF2B5EF4-FFF2-40B4-BE49-F238E27FC236}">
+              <a16:creationId xmlns:a16="http://schemas.microsoft.com/office/drawing/2014/main" id="{39E20235-E5A2-87CF-D656-45C1540D069C}"/>
+            </a:ext>
+          </a:extLst>
+        </p:cNvPr>
+        <p:cNvGrpSpPr/>
+        <p:nvPr/>
+      </p:nvGrpSpPr>
+      <p:grpSpPr>
+        <a:xfrm>
+          <a:off x="0" y="0"/>
+          <a:ext cx="0" cy="0"/>
+          <a:chOff x="0" y="0"/>
+          <a:chExt cx="0" cy="0"/>
+        </a:xfrm>
+      </p:grpSpPr>
+      <p:sp>
+        <p:nvSpPr>
+          <p:cNvPr id="2" name="Text Placeholder 1">
+            <a:extLst>
+              <a:ext uri="{FF2B5EF4-FFF2-40B4-BE49-F238E27FC236}">
+                <a16:creationId xmlns:a16="http://schemas.microsoft.com/office/drawing/2014/main" id="{E448D975-3815-1676-E6AB-C8E226BC701D}"/>
+              </a:ext>
+            </a:extLst>
+          </p:cNvPr>
+          <p:cNvSpPr>
+            <a:spLocks noGrp="1"/>
+          </p:cNvSpPr>
+          <p:nvPr>
+            <p:ph type="body" sz="quarter" idx="11"/>
+          </p:nvPr>
+        </p:nvSpPr>
+        <p:spPr/>
+        <p:txBody>
+          <a:bodyPr/>
+          <a:lstStyle/>
+          <a:p>
+            <a:r>
+              <a:rPr lang="en-US" dirty="0"/>
+              <a:t>Verification Successful</a:t>
+            </a:r>
+          </a:p>
+        </p:txBody>
+      </p:sp>
+      <p:sp>
+        <p:nvSpPr>
+          <p:cNvPr id="3" name="Text Placeholder 2">
+            <a:extLst>
+              <a:ext uri="{FF2B5EF4-FFF2-40B4-BE49-F238E27FC236}">
+                <a16:creationId xmlns:a16="http://schemas.microsoft.com/office/drawing/2014/main" id="{13563898-0F50-E660-2558-9B8DA411AB11}"/>
+              </a:ext>
+            </a:extLst>
+          </p:cNvPr>
+          <p:cNvSpPr>
+            <a:spLocks noGrp="1"/>
+          </p:cNvSpPr>
+          <p:nvPr>
+            <p:ph type="body" sz="quarter" idx="10"/>
+          </p:nvPr>
+        </p:nvSpPr>
+        <p:spPr/>
+        <p:txBody>
+          <a:bodyPr/>
+          <a:lstStyle/>
+          <a:p>
+            <a:pPr marL="285750" indent="-285750">
+              <a:buFont typeface="Arial" panose="020B0604020202020204" pitchFamily="34" charset="0"/>
+              <a:buChar char="•"/>
+            </a:pPr>
+            <a:r>
+              <a:rPr lang="en-US" dirty="0"/>
+              <a:t>Results seemed to match the first study</a:t>
+            </a:r>
+          </a:p>
+          <a:p>
+            <a:pPr marL="628650" lvl="1" indent="-285750">
+              <a:buFont typeface="Arial" panose="020B0604020202020204" pitchFamily="34" charset="0"/>
+              <a:buChar char="•"/>
+            </a:pPr>
+            <a:r>
+              <a:rPr lang="en-US" dirty="0"/>
+              <a:t>9.8 m/s^2 acceleration amplified to around 10.5-10.8 m/s^2</a:t>
+            </a:r>
+          </a:p>
+          <a:p>
+            <a:pPr marL="285750" indent="-285750">
+              <a:buFont typeface="Arial" panose="020B0604020202020204" pitchFamily="34" charset="0"/>
+              <a:buChar char="•"/>
+            </a:pPr>
+            <a:r>
+              <a:rPr lang="en-US" dirty="0"/>
+              <a:t>Verified with magnitude and z-axis movement</a:t>
+            </a:r>
+          </a:p>
+          <a:p>
+            <a:pPr marL="628650" lvl="1" indent="-285750">
+              <a:buFont typeface="Arial" panose="020B0604020202020204" pitchFamily="34" charset="0"/>
+              <a:buChar char="•"/>
+            </a:pPr>
+            <a:r>
+              <a:rPr lang="en-US" dirty="0"/>
+              <a:t>Z-axis movement seemed to be the most substantial</a:t>
+            </a:r>
+          </a:p>
+        </p:txBody>
+      </p:sp>
+      <p:sp>
+        <p:nvSpPr>
+          <p:cNvPr id="4" name="Title 3">
+            <a:extLst>
+              <a:ext uri="{FF2B5EF4-FFF2-40B4-BE49-F238E27FC236}">
+                <a16:creationId xmlns:a16="http://schemas.microsoft.com/office/drawing/2014/main" id="{36743305-C42A-99AF-E569-72982EE5EB52}"/>
+              </a:ext>
+            </a:extLst>
+          </p:cNvPr>
+          <p:cNvSpPr>
+            <a:spLocks noGrp="1"/>
+          </p:cNvSpPr>
+          <p:nvPr>
+            <p:ph type="title"/>
+          </p:nvPr>
+        </p:nvSpPr>
+        <p:spPr/>
+        <p:txBody>
+          <a:bodyPr>
+            <a:normAutofit/>
+          </a:bodyPr>
+          <a:lstStyle/>
+          <a:p>
+            <a:r>
+              <a:rPr lang="en-US" dirty="0"/>
+              <a:t>Furthered Data Analysis of IMU</a:t>
+            </a:r>
+          </a:p>
+        </p:txBody>
+      </p:sp>
+      <p:sp>
+        <p:nvSpPr>
+          <p:cNvPr id="5" name="Footer Placeholder 4">
+            <a:extLst>
+              <a:ext uri="{FF2B5EF4-FFF2-40B4-BE49-F238E27FC236}">
+                <a16:creationId xmlns:a16="http://schemas.microsoft.com/office/drawing/2014/main" id="{2C5213F2-E55B-1C1B-0902-40801C99AC90}"/>
+              </a:ext>
+            </a:extLst>
+          </p:cNvPr>
+          <p:cNvSpPr>
+            <a:spLocks noGrp="1"/>
+          </p:cNvSpPr>
+          <p:nvPr>
+            <p:ph type="ftr" sz="quarter" idx="12"/>
+          </p:nvPr>
+        </p:nvSpPr>
+        <p:spPr/>
+        <p:txBody>
+          <a:bodyPr/>
+          <a:lstStyle/>
+          <a:p>
+            <a:pPr algn="r"/>
+            <a:r>
+              <a:rPr lang="en-US"/>
+              <a:t>3/31/23            ‹#›</a:t>
+            </a:r>
+            <a:endParaRPr lang="en-US" dirty="0"/>
+          </a:p>
+        </p:txBody>
+      </p:sp>
+      <p:pic>
+        <p:nvPicPr>
+          <p:cNvPr id="6" name="Picture 5">
+            <a:extLst>
+              <a:ext uri="{FF2B5EF4-FFF2-40B4-BE49-F238E27FC236}">
+                <a16:creationId xmlns:a16="http://schemas.microsoft.com/office/drawing/2014/main" id="{6DE1D328-0E0B-310D-6CF6-F247C564F68F}"/>
+              </a:ext>
+            </a:extLst>
+          </p:cNvPr>
+          <p:cNvPicPr>
+            <a:picLocks noChangeAspect="1"/>
+          </p:cNvPicPr>
+          <p:nvPr/>
+        </p:nvPicPr>
+        <p:blipFill>
+          <a:blip r:embed="rId2"/>
+          <a:stretch>
+            <a:fillRect/>
+          </a:stretch>
+        </p:blipFill>
+        <p:spPr>
+          <a:xfrm>
+            <a:off x="2052724" y="2706960"/>
+            <a:ext cx="5408450" cy="3439584"/>
+          </a:xfrm>
+          <a:prstGeom prst="rect">
+            <a:avLst/>
+          </a:prstGeom>
+        </p:spPr>
+      </p:pic>
+    </p:spTree>
+    <p:extLst>
+      <p:ext uri="{BB962C8B-B14F-4D97-AF65-F5344CB8AC3E}">
+        <p14:creationId xmlns:p14="http://schemas.microsoft.com/office/powerpoint/2010/main" val="3819686682"/>
+      </p:ext>
+    </p:extLst>
+  </p:cSld>
+  <p:clrMapOvr>
+    <a:masterClrMapping/>
+  </p:clrMapOvr>
+</p:sld>
+</file>
+
+<file path=ppt/slides/slide5.xml><?xml version="1.0" encoding="utf-8"?>
+<p:sld xmlns:a="http://schemas.openxmlformats.org/drawingml/2006/main" xmlns:r="http://schemas.openxmlformats.org/officeDocument/2006/relationships" xmlns:p="http://schemas.openxmlformats.org/presentationml/2006/main">
+  <p:cSld>
+    <p:spTree>
+      <p:nvGrpSpPr>
+        <p:cNvPr id="1" name="">
+          <a:extLst>
+            <a:ext uri="{FF2B5EF4-FFF2-40B4-BE49-F238E27FC236}">
+              <a16:creationId xmlns:a16="http://schemas.microsoft.com/office/drawing/2014/main" id="{737CAC61-29E2-E190-6D5E-362AE752E131}"/>
+            </a:ext>
+          </a:extLst>
+        </p:cNvPr>
+        <p:cNvGrpSpPr/>
+        <p:nvPr/>
+      </p:nvGrpSpPr>
+      <p:grpSpPr>
+        <a:xfrm>
+          <a:off x="0" y="0"/>
+          <a:ext cx="0" cy="0"/>
+          <a:chOff x="0" y="0"/>
+          <a:chExt cx="0" cy="0"/>
+        </a:xfrm>
+      </p:grpSpPr>
+      <p:pic>
+        <p:nvPicPr>
+          <p:cNvPr id="6" name="Picture 5" descr="A diagram of a voltage multi strip line&#10;&#10;AI-generated content may be incorrect.">
+            <a:extLst>
+              <a:ext uri="{FF2B5EF4-FFF2-40B4-BE49-F238E27FC236}">
+                <a16:creationId xmlns:a16="http://schemas.microsoft.com/office/drawing/2014/main" id="{6D0A61CA-0648-052B-C929-3AAFDF1D0C25}"/>
+              </a:ext>
+            </a:extLst>
+          </p:cNvPr>
+          <p:cNvPicPr>
+            <a:picLocks noChangeAspect="1"/>
+          </p:cNvPicPr>
+          <p:nvPr/>
+        </p:nvPicPr>
+        <p:blipFill>
+          <a:blip r:embed="rId2"/>
+          <a:srcRect t="25477" b="6239"/>
+          <a:stretch>
+            <a:fillRect/>
+          </a:stretch>
+        </p:blipFill>
+        <p:spPr>
+          <a:xfrm>
+            <a:off x="4891490" y="1643074"/>
+            <a:ext cx="3909610" cy="2055591"/>
+          </a:xfrm>
+          <a:prstGeom prst="rect">
+            <a:avLst/>
+          </a:prstGeom>
+          <a:noFill/>
+        </p:spPr>
+      </p:pic>
+      <p:sp>
+        <p:nvSpPr>
+          <p:cNvPr id="4" name="Title 3">
+            <a:extLst>
+              <a:ext uri="{FF2B5EF4-FFF2-40B4-BE49-F238E27FC236}">
+                <a16:creationId xmlns:a16="http://schemas.microsoft.com/office/drawing/2014/main" id="{9C1A6DA5-876E-9903-91FA-219D06B330E4}"/>
+              </a:ext>
+            </a:extLst>
+          </p:cNvPr>
+          <p:cNvSpPr>
+            <a:spLocks noGrp="1"/>
+          </p:cNvSpPr>
+          <p:nvPr>
+            <p:ph type="title"/>
+          </p:nvPr>
+        </p:nvSpPr>
+        <p:spPr>
+          <a:xfrm>
+            <a:off x="351064" y="385004"/>
+            <a:ext cx="8450036" cy="589032"/>
+          </a:xfrm>
+        </p:spPr>
+        <p:txBody>
+          <a:bodyPr anchor="ctr">
+            <a:normAutofit/>
+          </a:bodyPr>
+          <a:lstStyle/>
+          <a:p>
+            <a:r>
+              <a:rPr lang="en-US" dirty="0"/>
+              <a:t>Research on RF to DC Converters</a:t>
+            </a:r>
+          </a:p>
+        </p:txBody>
+      </p:sp>
+      <p:pic>
+        <p:nvPicPr>
+          <p:cNvPr id="7" name="Picture 6" descr="A diagram of a network&#10;&#10;AI-generated content may be incorrect.">
+            <a:extLst>
+              <a:ext uri="{FF2B5EF4-FFF2-40B4-BE49-F238E27FC236}">
+                <a16:creationId xmlns:a16="http://schemas.microsoft.com/office/drawing/2014/main" id="{7D2DD721-03B0-AF9E-719E-7B5EDD329B81}"/>
+              </a:ext>
+            </a:extLst>
+          </p:cNvPr>
+          <p:cNvPicPr>
+            <a:picLocks noChangeAspect="1"/>
+          </p:cNvPicPr>
+          <p:nvPr/>
+        </p:nvPicPr>
+        <p:blipFill>
+          <a:blip r:embed="rId3"/>
+          <a:srcRect l="4878" r="4780" b="1"/>
+          <a:stretch>
+            <a:fillRect/>
+          </a:stretch>
+        </p:blipFill>
+        <p:spPr>
+          <a:xfrm>
+            <a:off x="4492226" y="3884038"/>
+            <a:ext cx="4308874" cy="2265516"/>
+          </a:xfrm>
+          <a:prstGeom prst="rect">
+            <a:avLst/>
+          </a:prstGeom>
+          <a:noFill/>
+        </p:spPr>
+      </p:pic>
+      <p:sp>
+        <p:nvSpPr>
+          <p:cNvPr id="2" name="Text Placeholder 1">
+            <a:extLst>
+              <a:ext uri="{FF2B5EF4-FFF2-40B4-BE49-F238E27FC236}">
+                <a16:creationId xmlns:a16="http://schemas.microsoft.com/office/drawing/2014/main" id="{DF003183-2582-D462-5A4C-39E785291A33}"/>
+              </a:ext>
+            </a:extLst>
+          </p:cNvPr>
+          <p:cNvSpPr>
+            <a:spLocks noGrp="1"/>
+          </p:cNvSpPr>
+          <p:nvPr>
+            <p:ph type="body" sz="quarter" idx="15"/>
+          </p:nvPr>
+        </p:nvSpPr>
+        <p:spPr>
+          <a:xfrm>
+            <a:off x="342900" y="954291"/>
+            <a:ext cx="8458200" cy="365760"/>
+          </a:xfrm>
+        </p:spPr>
+        <p:txBody>
+          <a:bodyPr>
+            <a:normAutofit/>
+          </a:bodyPr>
+          <a:lstStyle/>
+          <a:p>
+            <a:r>
+              <a:rPr lang="en-US" dirty="0"/>
+              <a:t>915 MHz Band Research Paper</a:t>
+            </a:r>
+          </a:p>
+          <a:p>
+            <a:endParaRPr lang="en-US" dirty="0"/>
+          </a:p>
+        </p:txBody>
+      </p:sp>
+      <p:sp>
+        <p:nvSpPr>
+          <p:cNvPr id="3" name="Text Placeholder 2">
+            <a:extLst>
+              <a:ext uri="{FF2B5EF4-FFF2-40B4-BE49-F238E27FC236}">
+                <a16:creationId xmlns:a16="http://schemas.microsoft.com/office/drawing/2014/main" id="{549A6C40-4A51-DBF6-7ED7-010EA2DF5471}"/>
+              </a:ext>
+            </a:extLst>
+          </p:cNvPr>
+          <p:cNvSpPr>
+            <a:spLocks noGrp="1"/>
+          </p:cNvSpPr>
+          <p:nvPr>
+            <p:ph idx="18"/>
+          </p:nvPr>
+        </p:nvSpPr>
+        <p:spPr>
+          <a:xfrm>
+            <a:off x="334737" y="1643074"/>
+            <a:ext cx="4308874" cy="4307571"/>
+          </a:xfrm>
+        </p:spPr>
+        <p:txBody>
+          <a:bodyPr>
+            <a:normAutofit/>
+          </a:bodyPr>
+          <a:lstStyle/>
+          <a:p>
+            <a:pPr marL="285750" indent="-285750">
+              <a:buFont typeface="Arial" panose="020B0604020202020204" pitchFamily="34" charset="0"/>
+              <a:buChar char="•"/>
+            </a:pPr>
+            <a:r>
+              <a:rPr lang="en-US" dirty="0"/>
+              <a:t>Very little circuitry needed to run the RF to DC converter successfully</a:t>
+            </a:r>
+          </a:p>
+          <a:p>
+            <a:pPr marL="285750" indent="-285750">
+              <a:buFont typeface="Arial" panose="020B0604020202020204" pitchFamily="34" charset="0"/>
+              <a:buChar char="•"/>
+            </a:pPr>
+            <a:r>
+              <a:rPr lang="en-US" dirty="0"/>
+              <a:t>Still need to acquire circuit components (harder than anticipated)</a:t>
+            </a:r>
+          </a:p>
+          <a:p>
+            <a:pPr marL="628650" lvl="1" indent="-285750">
+              <a:buFont typeface="Arial" panose="020B0604020202020204" pitchFamily="34" charset="0"/>
+              <a:buChar char="•"/>
+            </a:pPr>
+            <a:r>
+              <a:rPr lang="en-US" sz="1800" dirty="0"/>
+              <a:t>Fundamental Theory is very strong</a:t>
+            </a:r>
+          </a:p>
+          <a:p>
+            <a:pPr marL="285750" indent="-285750">
+              <a:buFont typeface="Arial" panose="020B0604020202020204" pitchFamily="34" charset="0"/>
+              <a:buChar char="•"/>
+            </a:pPr>
+            <a:r>
+              <a:rPr lang="en-US" dirty="0"/>
+              <a:t>System and Circuit Diagrams to the right</a:t>
+            </a:r>
+          </a:p>
+          <a:p>
+            <a:pPr marL="285750" indent="-285750">
+              <a:buFont typeface="Arial" panose="020B0604020202020204" pitchFamily="34" charset="0"/>
+              <a:buChar char="•"/>
+            </a:pPr>
+            <a:r>
+              <a:rPr lang="en-US" dirty="0"/>
+              <a:t>Works cited on last slide</a:t>
+            </a:r>
+          </a:p>
+          <a:p>
+            <a:pPr marL="285750" indent="-285750">
+              <a:buFont typeface="Arial" panose="020B0604020202020204" pitchFamily="34" charset="0"/>
+              <a:buChar char="•"/>
+            </a:pPr>
+            <a:endParaRPr lang="en-US" dirty="0"/>
+          </a:p>
+        </p:txBody>
+      </p:sp>
+      <p:sp>
+        <p:nvSpPr>
+          <p:cNvPr id="5" name="Footer Placeholder 4">
+            <a:extLst>
+              <a:ext uri="{FF2B5EF4-FFF2-40B4-BE49-F238E27FC236}">
+                <a16:creationId xmlns:a16="http://schemas.microsoft.com/office/drawing/2014/main" id="{3D8205AF-0FB0-451C-48F4-543A29DFEBE8}"/>
+              </a:ext>
+            </a:extLst>
+          </p:cNvPr>
+          <p:cNvSpPr>
+            <a:spLocks noGrp="1"/>
+          </p:cNvSpPr>
+          <p:nvPr>
+            <p:ph type="ftr" sz="quarter" idx="20"/>
+          </p:nvPr>
+        </p:nvSpPr>
+        <p:spPr>
+          <a:xfrm>
+            <a:off x="7461174" y="6295058"/>
+            <a:ext cx="1339925" cy="323970"/>
+          </a:xfrm>
+        </p:spPr>
+        <p:txBody>
+          <a:bodyPr anchor="ctr">
+            <a:normAutofit/>
+          </a:bodyPr>
+          <a:lstStyle/>
+          <a:p>
+            <a:pPr algn="r">
+              <a:spcAft>
+                <a:spcPts val="600"/>
+              </a:spcAft>
+            </a:pPr>
+            <a:r>
+              <a:rPr lang="en-US"/>
+              <a:t>3/31/23            ‹#›</a:t>
+            </a:r>
+          </a:p>
+        </p:txBody>
+      </p:sp>
+    </p:spTree>
+    <p:extLst>
+      <p:ext uri="{BB962C8B-B14F-4D97-AF65-F5344CB8AC3E}">
+        <p14:creationId xmlns:p14="http://schemas.microsoft.com/office/powerpoint/2010/main" val="3798299426"/>
+      </p:ext>
+    </p:extLst>
+  </p:cSld>
+  <p:clrMapOvr>
+    <a:masterClrMapping/>
+  </p:clrMapOvr>
+</p:sld>
+</file>
+
+<file path=ppt/slides/slide6.xml><?xml version="1.0" encoding="utf-8"?>
+<p:sld xmlns:a="http://schemas.openxmlformats.org/drawingml/2006/main" xmlns:r="http://schemas.openxmlformats.org/officeDocument/2006/relationships" xmlns:p="http://schemas.openxmlformats.org/presentationml/2006/main">
+  <p:cSld>
+    <p:spTree>
+      <p:nvGrpSpPr>
+        <p:cNvPr id="1" name=""/>
+        <p:cNvGrpSpPr/>
+        <p:nvPr/>
+      </p:nvGrpSpPr>
+      <p:grpSpPr>
+        <a:xfrm>
+          <a:off x="0" y="0"/>
+          <a:ext cx="0" cy="0"/>
+          <a:chOff x="0" y="0"/>
+          <a:chExt cx="0" cy="0"/>
+        </a:xfrm>
+      </p:grpSpPr>
+      <p:sp>
+        <p:nvSpPr>
+          <p:cNvPr id="4" name="Title 3">
+            <a:extLst>
+              <a:ext uri="{FF2B5EF4-FFF2-40B4-BE49-F238E27FC236}">
+                <a16:creationId xmlns:a16="http://schemas.microsoft.com/office/drawing/2014/main" id="{A81F1301-86F7-DB0D-C0BC-81A7F8B94465}"/>
+              </a:ext>
+            </a:extLst>
+          </p:cNvPr>
+          <p:cNvSpPr>
+            <a:spLocks noGrp="1"/>
+          </p:cNvSpPr>
+          <p:nvPr>
+            <p:ph type="title"/>
+          </p:nvPr>
+        </p:nvSpPr>
+        <p:spPr>
+          <a:xfrm>
+            <a:off x="351064" y="385004"/>
+            <a:ext cx="8450036" cy="589032"/>
+          </a:xfrm>
+        </p:spPr>
+        <p:txBody>
+          <a:bodyPr anchor="ctr">
+            <a:normAutofit/>
+          </a:bodyPr>
+          <a:lstStyle/>
+          <a:p>
+            <a:r>
+              <a:rPr lang="en-US" dirty="0" err="1"/>
+              <a:t>DigiKey</a:t>
+            </a:r>
+            <a:r>
+              <a:rPr lang="en-US" dirty="0"/>
+              <a:t> Parts Ordering</a:t>
+            </a:r>
+          </a:p>
+        </p:txBody>
+      </p:sp>
+      <p:sp>
+        <p:nvSpPr>
+          <p:cNvPr id="3" name="Text Placeholder 2">
+            <a:extLst>
+              <a:ext uri="{FF2B5EF4-FFF2-40B4-BE49-F238E27FC236}">
+                <a16:creationId xmlns:a16="http://schemas.microsoft.com/office/drawing/2014/main" id="{1599CA37-B728-B9F3-FBA8-5ED1423C0538}"/>
+              </a:ext>
+            </a:extLst>
+          </p:cNvPr>
+          <p:cNvSpPr>
+            <a:spLocks noGrp="1"/>
+          </p:cNvSpPr>
+          <p:nvPr>
+            <p:ph idx="12"/>
+          </p:nvPr>
+        </p:nvSpPr>
+        <p:spPr>
+          <a:xfrm>
+            <a:off x="351065" y="1543324"/>
+            <a:ext cx="4059877" cy="4390338"/>
+          </a:xfrm>
+        </p:spPr>
+        <p:txBody>
+          <a:bodyPr>
+            <a:normAutofit/>
+          </a:bodyPr>
+          <a:lstStyle/>
+          <a:p>
+            <a:pPr marL="285750" indent="-285750">
+              <a:buFont typeface="Arial" panose="020B0604020202020204" pitchFamily="34" charset="0"/>
+              <a:buChar char="•"/>
+            </a:pPr>
+            <a:r>
+              <a:rPr lang="en-US" b="1" dirty="0"/>
+              <a:t>F Number </a:t>
+            </a:r>
+            <a:r>
+              <a:rPr lang="en-US" dirty="0"/>
+              <a:t>needed to subvert filling out of Form 12 repetitively</a:t>
+            </a:r>
+          </a:p>
+          <a:p>
+            <a:pPr marL="285750" indent="-285750">
+              <a:buFont typeface="Arial" panose="020B0604020202020204" pitchFamily="34" charset="0"/>
+              <a:buChar char="•"/>
+            </a:pPr>
+            <a:r>
+              <a:rPr lang="en-US" dirty="0" err="1"/>
+              <a:t>DigiKey</a:t>
+            </a:r>
+            <a:r>
+              <a:rPr lang="en-US" dirty="0"/>
+              <a:t> and Mouser Orders can be filed and filled remotely</a:t>
+            </a:r>
+          </a:p>
+          <a:p>
+            <a:pPr marL="285750" indent="-285750">
+              <a:buFont typeface="Arial" panose="020B0604020202020204" pitchFamily="34" charset="0"/>
+              <a:buChar char="•"/>
+            </a:pPr>
+            <a:r>
+              <a:rPr lang="en-US" dirty="0"/>
+              <a:t>Cart for needed PCB components already setup:</a:t>
+            </a:r>
+          </a:p>
+          <a:p>
+            <a:pPr marL="628650" lvl="1" indent="-285750">
+              <a:buFont typeface="Arial" panose="020B0604020202020204" pitchFamily="34" charset="0"/>
+              <a:buChar char="•"/>
+            </a:pPr>
+            <a:r>
+              <a:rPr lang="en-US" sz="1800" dirty="0">
+                <a:hlinkClick r:id="rId2"/>
+              </a:rPr>
+              <a:t>https://www.digikey.com/short/p757fqdw</a:t>
+            </a:r>
+            <a:endParaRPr lang="en-US" sz="1800" dirty="0"/>
+          </a:p>
+          <a:p>
+            <a:pPr marL="628650" lvl="1" indent="-285750">
+              <a:buFont typeface="Arial" panose="020B0604020202020204" pitchFamily="34" charset="0"/>
+              <a:buChar char="•"/>
+            </a:pPr>
+            <a:r>
+              <a:rPr lang="en-US" sz="1800" dirty="0"/>
+              <a:t>~$30 Total</a:t>
+            </a:r>
+          </a:p>
+        </p:txBody>
+      </p:sp>
+      <p:pic>
+        <p:nvPicPr>
+          <p:cNvPr id="7" name="Picture 6" descr="Screenshot of a screenshot of a computer&#10;&#10;AI-generated content may be incorrect.">
+            <a:extLst>
+              <a:ext uri="{FF2B5EF4-FFF2-40B4-BE49-F238E27FC236}">
+                <a16:creationId xmlns:a16="http://schemas.microsoft.com/office/drawing/2014/main" id="{80DC2DFF-9473-529C-9C2D-87C1AF510C29}"/>
+              </a:ext>
+            </a:extLst>
+          </p:cNvPr>
+          <p:cNvPicPr>
+            <a:picLocks noChangeAspect="1"/>
+          </p:cNvPicPr>
+          <p:nvPr/>
+        </p:nvPicPr>
+        <p:blipFill>
+          <a:blip r:embed="rId3"/>
+          <a:srcRect t="2765" r="-1" b="16855"/>
+          <a:stretch>
+            <a:fillRect/>
+          </a:stretch>
+        </p:blipFill>
+        <p:spPr>
+          <a:xfrm>
+            <a:off x="4731868" y="1543324"/>
+            <a:ext cx="4069232" cy="4390338"/>
+          </a:xfrm>
+          <a:prstGeom prst="rect">
+            <a:avLst/>
+          </a:prstGeom>
+          <a:noFill/>
+        </p:spPr>
+      </p:pic>
+      <p:sp>
+        <p:nvSpPr>
+          <p:cNvPr id="2" name="Text Placeholder 1">
+            <a:extLst>
+              <a:ext uri="{FF2B5EF4-FFF2-40B4-BE49-F238E27FC236}">
+                <a16:creationId xmlns:a16="http://schemas.microsoft.com/office/drawing/2014/main" id="{4761F208-C6C3-7A13-2C46-ED202BF9904D}"/>
+              </a:ext>
+            </a:extLst>
+          </p:cNvPr>
+          <p:cNvSpPr>
+            <a:spLocks noGrp="1"/>
+          </p:cNvSpPr>
+          <p:nvPr>
+            <p:ph type="body" sz="quarter" idx="11"/>
+          </p:nvPr>
+        </p:nvSpPr>
+        <p:spPr>
+          <a:xfrm>
+            <a:off x="342900" y="954291"/>
+            <a:ext cx="8458200" cy="365760"/>
+          </a:xfrm>
+        </p:spPr>
+        <p:txBody>
+          <a:bodyPr>
+            <a:normAutofit/>
+          </a:bodyPr>
+          <a:lstStyle/>
+          <a:p>
+            <a:r>
+              <a:rPr lang="en-US" dirty="0"/>
+              <a:t>Parts List Curated – F Number Required (Procurement Office)</a:t>
+            </a:r>
+          </a:p>
+          <a:p>
+            <a:endParaRPr lang="en-US" dirty="0"/>
+          </a:p>
+        </p:txBody>
+      </p:sp>
+      <p:sp>
+        <p:nvSpPr>
+          <p:cNvPr id="5" name="Footer Placeholder 4">
+            <a:extLst>
+              <a:ext uri="{FF2B5EF4-FFF2-40B4-BE49-F238E27FC236}">
+                <a16:creationId xmlns:a16="http://schemas.microsoft.com/office/drawing/2014/main" id="{4D0CDDF4-9EB6-E07E-E2ED-C414A85D8C41}"/>
+              </a:ext>
+            </a:extLst>
+          </p:cNvPr>
+          <p:cNvSpPr>
+            <a:spLocks noGrp="1"/>
+          </p:cNvSpPr>
+          <p:nvPr>
+            <p:ph type="ftr" sz="quarter" idx="14"/>
+          </p:nvPr>
+        </p:nvSpPr>
+        <p:spPr>
+          <a:xfrm>
+            <a:off x="7461174" y="6295058"/>
+            <a:ext cx="1339925" cy="323970"/>
+          </a:xfrm>
+        </p:spPr>
+        <p:txBody>
+          <a:bodyPr anchor="ctr">
+            <a:normAutofit/>
+          </a:bodyPr>
+          <a:lstStyle/>
+          <a:p>
+            <a:pPr algn="r">
+              <a:spcAft>
+                <a:spcPts val="600"/>
+              </a:spcAft>
+            </a:pPr>
+            <a:r>
+              <a:rPr lang="en-US"/>
+              <a:t>3/31/23            ‹#›</a:t>
+            </a:r>
+          </a:p>
+        </p:txBody>
+      </p:sp>
+    </p:spTree>
+    <p:extLst>
+      <p:ext uri="{BB962C8B-B14F-4D97-AF65-F5344CB8AC3E}">
+        <p14:creationId xmlns:p14="http://schemas.microsoft.com/office/powerpoint/2010/main" val="364219148"/>
+      </p:ext>
+    </p:extLst>
+  </p:cSld>
+  <p:clrMapOvr>
+    <a:masterClrMapping/>
+  </p:clrMapOvr>
+</p:sld>
+</file>
+
+<file path=ppt/slides/slide7.xml><?xml version="1.0" encoding="utf-8"?>
+<p:sld xmlns:a="http://schemas.openxmlformats.org/drawingml/2006/main" xmlns:r="http://schemas.openxmlformats.org/officeDocument/2006/relationships" xmlns:p="http://schemas.openxmlformats.org/presentationml/2006/main">
+  <p:cSld>
+    <p:spTree>
+      <p:nvGrpSpPr>
+        <p:cNvPr id="1" name=""/>
+        <p:cNvGrpSpPr/>
+        <p:nvPr/>
+      </p:nvGrpSpPr>
+      <p:grpSpPr>
+        <a:xfrm>
+          <a:off x="0" y="0"/>
+          <a:ext cx="0" cy="0"/>
+          <a:chOff x="0" y="0"/>
+          <a:chExt cx="0" cy="0"/>
+        </a:xfrm>
+      </p:grpSpPr>
+      <p:sp>
+        <p:nvSpPr>
+          <p:cNvPr id="2" name="Text Placeholder 1">
+            <a:extLst>
+              <a:ext uri="{FF2B5EF4-FFF2-40B4-BE49-F238E27FC236}">
+                <a16:creationId xmlns:a16="http://schemas.microsoft.com/office/drawing/2014/main" id="{1D65E09E-8D57-2F96-EEC5-FBD3DC94C27B}"/>
+              </a:ext>
+            </a:extLst>
+          </p:cNvPr>
+          <p:cNvSpPr>
+            <a:spLocks noGrp="1"/>
+          </p:cNvSpPr>
+          <p:nvPr>
+            <p:ph type="body" sz="quarter" idx="11"/>
+          </p:nvPr>
+        </p:nvSpPr>
+        <p:spPr/>
+        <p:txBody>
+          <a:bodyPr/>
+          <a:lstStyle/>
+          <a:p>
+            <a:r>
+              <a:rPr lang="en-US" dirty="0"/>
+              <a:t>Sent electrical components needed for study to department</a:t>
+            </a:r>
+          </a:p>
+        </p:txBody>
+      </p:sp>
+      <p:sp>
+        <p:nvSpPr>
+          <p:cNvPr id="3" name="Text Placeholder 2">
+            <a:extLst>
+              <a:ext uri="{FF2B5EF4-FFF2-40B4-BE49-F238E27FC236}">
+                <a16:creationId xmlns:a16="http://schemas.microsoft.com/office/drawing/2014/main" id="{F686C64B-108A-885C-BAAE-5EA08E64C417}"/>
+              </a:ext>
+            </a:extLst>
+          </p:cNvPr>
+          <p:cNvSpPr>
+            <a:spLocks noGrp="1"/>
+          </p:cNvSpPr>
+          <p:nvPr>
+            <p:ph type="body" sz="quarter" idx="10"/>
+          </p:nvPr>
+        </p:nvSpPr>
+        <p:spPr>
+          <a:xfrm>
+            <a:off x="334200" y="1430629"/>
+            <a:ext cx="8450035" cy="4454706"/>
+          </a:xfrm>
+        </p:spPr>
+        <p:txBody>
+          <a:bodyPr/>
+          <a:lstStyle/>
+          <a:p>
+            <a:pPr marL="285750" indent="-285750">
+              <a:buFont typeface="Arial" panose="020B0604020202020204" pitchFamily="34" charset="0"/>
+              <a:buChar char="•"/>
+            </a:pPr>
+            <a:r>
+              <a:rPr lang="en-US" dirty="0"/>
+              <a:t>USB-A -&gt; LiPo Charger</a:t>
+            </a:r>
+          </a:p>
+          <a:p>
+            <a:pPr marL="285750" indent="-285750">
+              <a:buFont typeface="Arial" panose="020B0604020202020204" pitchFamily="34" charset="0"/>
+              <a:buChar char="•"/>
+            </a:pPr>
+            <a:r>
+              <a:rPr lang="en-US" dirty="0"/>
+              <a:t>JST PH 2mm 2-Pin to Female Socket Cable - 200mm</a:t>
+            </a:r>
+          </a:p>
+          <a:p>
+            <a:endParaRPr lang="en-US" dirty="0"/>
+          </a:p>
+        </p:txBody>
+      </p:sp>
+      <p:sp>
+        <p:nvSpPr>
+          <p:cNvPr id="4" name="Title 3">
+            <a:extLst>
+              <a:ext uri="{FF2B5EF4-FFF2-40B4-BE49-F238E27FC236}">
+                <a16:creationId xmlns:a16="http://schemas.microsoft.com/office/drawing/2014/main" id="{6DA8AAD0-9345-A0B1-195A-429D42D8EF66}"/>
+              </a:ext>
+            </a:extLst>
+          </p:cNvPr>
+          <p:cNvSpPr>
+            <a:spLocks noGrp="1"/>
+          </p:cNvSpPr>
+          <p:nvPr>
+            <p:ph type="title"/>
+          </p:nvPr>
+        </p:nvSpPr>
+        <p:spPr/>
+        <p:txBody>
+          <a:bodyPr>
+            <a:normAutofit/>
+          </a:bodyPr>
+          <a:lstStyle/>
+          <a:p>
+            <a:r>
+              <a:rPr lang="en-US" dirty="0"/>
+              <a:t>Agriculture Components</a:t>
+            </a:r>
+          </a:p>
+        </p:txBody>
+      </p:sp>
+      <p:sp>
+        <p:nvSpPr>
+          <p:cNvPr id="5" name="Footer Placeholder 4">
+            <a:extLst>
+              <a:ext uri="{FF2B5EF4-FFF2-40B4-BE49-F238E27FC236}">
+                <a16:creationId xmlns:a16="http://schemas.microsoft.com/office/drawing/2014/main" id="{64DA0301-8D63-7744-7AC7-5E5901C26C36}"/>
+              </a:ext>
+            </a:extLst>
+          </p:cNvPr>
+          <p:cNvSpPr>
+            <a:spLocks noGrp="1"/>
+          </p:cNvSpPr>
+          <p:nvPr>
+            <p:ph type="ftr" sz="quarter" idx="12"/>
+          </p:nvPr>
+        </p:nvSpPr>
+        <p:spPr/>
+        <p:txBody>
+          <a:bodyPr/>
+          <a:lstStyle/>
+          <a:p>
+            <a:pPr algn="r"/>
+            <a:r>
+              <a:rPr lang="en-US"/>
+              <a:t>3/31/23            ‹#›</a:t>
+            </a:r>
+            <a:endParaRPr lang="en-US" dirty="0"/>
+          </a:p>
+        </p:txBody>
+      </p:sp>
+      <p:pic>
+        <p:nvPicPr>
+          <p:cNvPr id="2050" name="Picture 2">
+            <a:extLst>
+              <a:ext uri="{FF2B5EF4-FFF2-40B4-BE49-F238E27FC236}">
+                <a16:creationId xmlns:a16="http://schemas.microsoft.com/office/drawing/2014/main" id="{5F5B3C2C-CABB-856C-1FB9-55D3DC392C40}"/>
+              </a:ext>
+            </a:extLst>
+          </p:cNvPr>
+          <p:cNvPicPr>
+            <a:picLocks noChangeAspect="1" noChangeArrowheads="1"/>
+          </p:cNvPicPr>
+          <p:nvPr/>
+        </p:nvPicPr>
+        <p:blipFill>
+          <a:blip r:embed="rId2">
+            <a:extLst>
+              <a:ext uri="{28A0092B-C50C-407E-A947-70E740481C1C}">
+                <a14:useLocalDpi xmlns:a14="http://schemas.microsoft.com/office/drawing/2010/main" val="0"/>
+              </a:ext>
+            </a:extLst>
+          </a:blip>
+          <a:srcRect/>
+          <a:stretch>
+            <a:fillRect/>
+          </a:stretch>
+        </p:blipFill>
+        <p:spPr bwMode="auto">
+          <a:xfrm>
+            <a:off x="647783" y="2386637"/>
+            <a:ext cx="3341809" cy="3357352"/>
+          </a:xfrm>
+          <a:prstGeom prst="rect">
+            <a:avLst/>
+          </a:prstGeom>
+          <a:noFill/>
+          <a:extLst>
+            <a:ext uri="{909E8E84-426E-40DD-AFC4-6F175D3DCCD1}">
+              <a14:hiddenFill xmlns:a14="http://schemas.microsoft.com/office/drawing/2010/main">
+                <a:solidFill>
+                  <a:srgbClr val="FFFFFF"/>
+                </a:solidFill>
+              </a14:hiddenFill>
+            </a:ext>
+          </a:extLst>
+        </p:spPr>
+      </p:pic>
+      <p:pic>
+        <p:nvPicPr>
+          <p:cNvPr id="2052" name="Picture 4" descr="Adafruit Micro-Lipo Charger for LiPo/LiIon Batt w/MicroUSB Jack connected to battery. ">
+            <a:extLst>
+              <a:ext uri="{FF2B5EF4-FFF2-40B4-BE49-F238E27FC236}">
+                <a16:creationId xmlns:a16="http://schemas.microsoft.com/office/drawing/2014/main" id="{511769AD-F617-B924-2EDF-F5021A68D85E}"/>
+              </a:ext>
+            </a:extLst>
+          </p:cNvPr>
+          <p:cNvPicPr>
+            <a:picLocks noChangeAspect="1" noChangeArrowheads="1"/>
+          </p:cNvPicPr>
+          <p:nvPr/>
+        </p:nvPicPr>
+        <p:blipFill>
+          <a:blip r:embed="rId3">
+            <a:extLst>
+              <a:ext uri="{28A0092B-C50C-407E-A947-70E740481C1C}">
+                <a14:useLocalDpi xmlns:a14="http://schemas.microsoft.com/office/drawing/2010/main" val="0"/>
+              </a:ext>
+            </a:extLst>
+          </a:blip>
+          <a:srcRect/>
+          <a:stretch>
+            <a:fillRect/>
+          </a:stretch>
+        </p:blipFill>
+        <p:spPr bwMode="auto">
+          <a:xfrm>
+            <a:off x="4559217" y="2944609"/>
+            <a:ext cx="3937000" cy="2959100"/>
+          </a:xfrm>
+          <a:prstGeom prst="rect">
+            <a:avLst/>
+          </a:prstGeom>
+          <a:noFill/>
+          <a:extLst>
+            <a:ext uri="{909E8E84-426E-40DD-AFC4-6F175D3DCCD1}">
+              <a14:hiddenFill xmlns:a14="http://schemas.microsoft.com/office/drawing/2010/main">
+                <a:solidFill>
+                  <a:srgbClr val="FFFFFF"/>
+                </a:solidFill>
+              </a14:hiddenFill>
+            </a:ext>
+          </a:extLst>
+        </p:spPr>
+      </p:pic>
+    </p:spTree>
+    <p:extLst>
+      <p:ext uri="{BB962C8B-B14F-4D97-AF65-F5344CB8AC3E}">
+        <p14:creationId xmlns:p14="http://schemas.microsoft.com/office/powerpoint/2010/main" val="3162920834"/>
+      </p:ext>
+    </p:extLst>
+  </p:cSld>
+  <p:clrMapOvr>
+    <a:masterClrMapping/>
+  </p:clrMapOvr>
+</p:sld>
+</file>
+
+<file path=ppt/slides/slide8.xml><?xml version="1.0" encoding="utf-8"?>
 <p:sld xmlns:a="http://schemas.openxmlformats.org/drawingml/2006/main" xmlns:r="http://schemas.openxmlformats.org/officeDocument/2006/relationships" xmlns:p="http://schemas.openxmlformats.org/presentationml/2006/main">
   <p:cSld>
     <p:spTree>
@@ -14044,7 +15512,7 @@
             </a:pPr>
             <a:r>
               <a:rPr lang="en-US" dirty="0"/>
-              <a:t>More Data Analysis of IMU</a:t>
+              <a:t>Begin foundations of research paper (Overleaf)</a:t>
             </a:r>
           </a:p>
           <a:p>
@@ -14054,15 +15522,7 @@
             </a:pPr>
             <a:r>
               <a:rPr lang="en-US" dirty="0"/>
-              <a:t>Obtain </a:t>
-            </a:r>
-            <a:r>
-              <a:rPr lang="en-US" dirty="0" err="1"/>
-              <a:t>Powercast</a:t>
-            </a:r>
-            <a:r>
-              <a:rPr lang="en-US" dirty="0"/>
-              <a:t> RFID -&gt; DC Converters from Agriculture</a:t>
+              <a:t>Ensure that agriculture study has gone successfully and there are no blockers</a:t>
             </a:r>
           </a:p>
           <a:p>
@@ -14072,25 +15532,7 @@
             </a:pPr>
             <a:r>
               <a:rPr lang="en-US" dirty="0"/>
-              <a:t>Verify </a:t>
-            </a:r>
-            <a:r>
-              <a:rPr lang="en-US" dirty="0" err="1"/>
-              <a:t>Powercast</a:t>
-            </a:r>
-            <a:r>
-              <a:rPr lang="en-US" dirty="0"/>
-              <a:t> RFID circuits on breadboard</a:t>
-            </a:r>
-          </a:p>
-          <a:p>
-            <a:pPr marL="285750" indent="-285750">
-              <a:buFont typeface="Arial" panose="020B0604020202020204" pitchFamily="34" charset="0"/>
-              <a:buChar char="•"/>
-            </a:pPr>
-            <a:r>
-              <a:rPr lang="en-US" dirty="0"/>
-              <a:t>Research Papers:</a:t>
+              <a:t>Research American PCB vendors to order assembled PCB from</a:t>
             </a:r>
           </a:p>
           <a:p>
@@ -14100,67 +15542,15 @@
             </a:pPr>
             <a:r>
               <a:rPr lang="en-US" dirty="0"/>
-              <a:t>IEEE</a:t>
-            </a:r>
-          </a:p>
-          <a:p>
-            <a:pPr marL="628650" lvl="1" indent="-285750">
-              <a:buFont typeface="Arial" panose="020B0604020202020204" pitchFamily="34" charset="0"/>
-              <a:buChar char="•"/>
-            </a:pPr>
-            <a:r>
-              <a:rPr lang="en-US" dirty="0"/>
-              <a:t>Transactions on Electronics Circuits and Systems</a:t>
-            </a:r>
-          </a:p>
-          <a:p>
-            <a:pPr marL="971550" lvl="2" indent="-285750">
-              <a:buFont typeface="Arial" panose="020B0604020202020204" pitchFamily="34" charset="0"/>
-              <a:buChar char="•"/>
-            </a:pPr>
-            <a:r>
-              <a:rPr lang="en-US" dirty="0"/>
-              <a:t>2 – 5 pages</a:t>
-            </a:r>
-          </a:p>
-          <a:p>
-            <a:pPr marL="971550" lvl="2" indent="-285750">
-              <a:buFont typeface="Arial" panose="020B0604020202020204" pitchFamily="34" charset="0"/>
-              <a:buChar char="•"/>
-            </a:pPr>
-            <a:r>
-              <a:rPr lang="en-US" dirty="0"/>
-              <a:t>1 – Long Journal</a:t>
-            </a:r>
-          </a:p>
-          <a:p>
-            <a:pPr marL="628650" lvl="1" indent="-285750">
-              <a:buFont typeface="Arial" panose="020B0604020202020204" pitchFamily="34" charset="0"/>
-              <a:buChar char="•"/>
-            </a:pPr>
-            <a:r>
-              <a:rPr lang="en-US" dirty="0"/>
-              <a:t>IoT Journal &lt;-</a:t>
-            </a:r>
-          </a:p>
-          <a:p>
-            <a:pPr marL="628650" lvl="1" indent="-285750">
-              <a:buFont typeface="Arial" panose="020B0604020202020204" pitchFamily="34" charset="0"/>
-              <a:buChar char="•"/>
-            </a:pPr>
-            <a:r>
-              <a:rPr lang="en-US" dirty="0"/>
-              <a:t>Transactions on Industrial Electronics</a:t>
-            </a:r>
-          </a:p>
-          <a:p>
-            <a:pPr marL="628650" lvl="1" indent="-285750">
-              <a:buFont typeface="Arial" panose="020B0604020202020204" pitchFamily="34" charset="0"/>
-              <a:buChar char="•"/>
-            </a:pPr>
-            <a:r>
-              <a:rPr lang="en-US" dirty="0"/>
-              <a:t>Electronics DPI</a:t>
+              <a:t>Unable to use Chinese vendors (</a:t>
+            </a:r>
+            <a:r>
+              <a:rPr lang="en-US" dirty="0" err="1"/>
+              <a:t>PCBWay</a:t>
+            </a:r>
+            <a:r>
+              <a:rPr lang="en-US" dirty="0"/>
+              <a:t>, JLCPCB) anymore</a:t>
             </a:r>
           </a:p>
         </p:txBody>
@@ -14235,7 +15625,7 @@
 </p:sld>
 </file>
 
-<file path=ppt/slides/slide4.xml><?xml version="1.0" encoding="utf-8"?>
+<file path=ppt/slides/slide9.xml><?xml version="1.0" encoding="utf-8"?>
 <p:sld xmlns:a="http://schemas.openxmlformats.org/drawingml/2006/main" xmlns:r="http://schemas.openxmlformats.org/officeDocument/2006/relationships" xmlns:p="http://schemas.openxmlformats.org/presentationml/2006/main">
   <p:cSld>
     <p:spTree>
@@ -14254,66 +15644,135 @@
       </p:grpSpPr>
       <p:sp>
         <p:nvSpPr>
-          <p:cNvPr id="2" name="Title 1">
-            <a:extLst>
-              <a:ext uri="{FF2B5EF4-FFF2-40B4-BE49-F238E27FC236}">
-                <a16:creationId xmlns:a16="http://schemas.microsoft.com/office/drawing/2014/main" id="{E4E72CBA-026F-7E96-546F-23B8813A83DA}"/>
-              </a:ext>
-            </a:extLst>
-          </p:cNvPr>
-          <p:cNvSpPr>
-            <a:spLocks noGrp="1"/>
-          </p:cNvSpPr>
-          <p:nvPr>
-            <p:ph type="title"/>
-          </p:nvPr>
-        </p:nvSpPr>
-        <p:spPr/>
+          <p:cNvPr id="3" name="Text Placeholder 2">
+            <a:extLst>
+              <a:ext uri="{FF2B5EF4-FFF2-40B4-BE49-F238E27FC236}">
+                <a16:creationId xmlns:a16="http://schemas.microsoft.com/office/drawing/2014/main" id="{9FBEEAEB-3CBD-3030-4841-1424455FD66C}"/>
+              </a:ext>
+            </a:extLst>
+          </p:cNvPr>
+          <p:cNvSpPr>
+            <a:spLocks noGrp="1"/>
+          </p:cNvSpPr>
+          <p:nvPr>
+            <p:ph type="body" sz="quarter" idx="10"/>
+          </p:nvPr>
+        </p:nvSpPr>
+        <p:spPr>
+          <a:xfrm>
+            <a:off x="346982" y="1068311"/>
+            <a:ext cx="8450035" cy="4454706"/>
+          </a:xfrm>
+        </p:spPr>
         <p:txBody>
           <a:bodyPr/>
           <a:lstStyle/>
           <a:p>
-            <a:r>
-              <a:rPr lang="en-US" dirty="0"/>
-              <a:t>Thank You</a:t>
-            </a:r>
-          </a:p>
-        </p:txBody>
-      </p:sp>
-      <p:sp>
-        <p:nvSpPr>
-          <p:cNvPr id="3" name="Text Placeholder 2">
-            <a:extLst>
-              <a:ext uri="{FF2B5EF4-FFF2-40B4-BE49-F238E27FC236}">
-                <a16:creationId xmlns:a16="http://schemas.microsoft.com/office/drawing/2014/main" id="{CE8FBDCD-BC38-D4A8-A210-EA02F2610057}"/>
-              </a:ext>
-            </a:extLst>
-          </p:cNvPr>
-          <p:cNvSpPr>
-            <a:spLocks noGrp="1"/>
-          </p:cNvSpPr>
-          <p:nvPr>
-            <p:ph type="body" sz="quarter" idx="10"/>
+            <a:pPr marL="285750" indent="-285750">
+              <a:buFont typeface="Arial" panose="020B0604020202020204" pitchFamily="34" charset="0"/>
+              <a:buChar char="•"/>
+            </a:pPr>
+            <a:r>
+              <a:rPr lang="en-US" altLang="en-US" dirty="0">
+                <a:solidFill>
+                  <a:srgbClr val="000000"/>
+                </a:solidFill>
+                <a:latin typeface="-webkit-standard"/>
+              </a:rPr>
+              <a:t>J. G. D. P. Pinto, H. J. C. P. Oliveira, and N. B. Carvalho, "RF energy harvesting and remote powering at 900MHz and 2.4GHz," in </a:t>
+            </a:r>
+            <a:r>
+              <a:rPr lang="en-US" altLang="en-US" i="1" dirty="0">
+                <a:solidFill>
+                  <a:srgbClr val="000000"/>
+                </a:solidFill>
+              </a:rPr>
+              <a:t>2015 IEEE Wireless Power Transfer Conference (WPTC)</a:t>
+            </a:r>
+            <a:r>
+              <a:rPr lang="en-US" altLang="en-US" dirty="0">
+                <a:solidFill>
+                  <a:srgbClr val="000000"/>
+                </a:solidFill>
+                <a:latin typeface="-webkit-standard"/>
+              </a:rPr>
+              <a:t>, Boulder, CO, USA, 2015, pp. 1-3.</a:t>
+            </a:r>
+            <a:endParaRPr lang="en-US" altLang="en-US" dirty="0">
+              <a:latin typeface="Arial" panose="020B0604020202020204" pitchFamily="34" charset="0"/>
+            </a:endParaRPr>
+          </a:p>
+          <a:p>
+            <a:pPr marL="285750" indent="-285750">
+              <a:buFont typeface="Arial" panose="020B0604020202020204" pitchFamily="34" charset="0"/>
+              <a:buChar char="•"/>
+            </a:pPr>
+            <a:endParaRPr lang="en-US" dirty="0"/>
+          </a:p>
+        </p:txBody>
+      </p:sp>
+      <p:sp>
+        <p:nvSpPr>
+          <p:cNvPr id="4" name="Title 3">
+            <a:extLst>
+              <a:ext uri="{FF2B5EF4-FFF2-40B4-BE49-F238E27FC236}">
+                <a16:creationId xmlns:a16="http://schemas.microsoft.com/office/drawing/2014/main" id="{76F5BC59-B263-05A4-B00C-D63E41B204C1}"/>
+              </a:ext>
+            </a:extLst>
+          </p:cNvPr>
+          <p:cNvSpPr>
+            <a:spLocks noGrp="1"/>
+          </p:cNvSpPr>
+          <p:nvPr>
+            <p:ph type="title"/>
           </p:nvPr>
         </p:nvSpPr>
         <p:spPr/>
         <p:txBody>
-          <a:bodyPr>
-            <a:normAutofit/>
-          </a:bodyPr>
+          <a:bodyPr/>
           <a:lstStyle/>
           <a:p>
             <a:r>
               <a:rPr lang="en-US" dirty="0"/>
-              <a:t>Purdue Polytechnic Institute</a:t>
-            </a:r>
+              <a:t>Works Cited</a:t>
+            </a:r>
+          </a:p>
+        </p:txBody>
+      </p:sp>
+      <p:sp>
+        <p:nvSpPr>
+          <p:cNvPr id="5" name="Footer Placeholder 4">
+            <a:extLst>
+              <a:ext uri="{FF2B5EF4-FFF2-40B4-BE49-F238E27FC236}">
+                <a16:creationId xmlns:a16="http://schemas.microsoft.com/office/drawing/2014/main" id="{97ACD8E5-CB5D-F6DA-E9FA-3832C18D233C}"/>
+              </a:ext>
+            </a:extLst>
+          </p:cNvPr>
+          <p:cNvSpPr>
+            <a:spLocks noGrp="1"/>
+          </p:cNvSpPr>
+          <p:nvPr>
+            <p:ph type="ftr" sz="quarter" idx="12"/>
+          </p:nvPr>
+        </p:nvSpPr>
+        <p:spPr/>
+        <p:txBody>
+          <a:bodyPr/>
+          <a:lstStyle/>
+          <a:p>
+            <a:pPr algn="r"/>
+            <a:r>
+              <a:rPr lang="en-US"/>
+              <a:t>3/31/23            ‹#›</a:t>
+            </a:r>
+            <a:endParaRPr lang="en-US" dirty="0"/>
           </a:p>
         </p:txBody>
       </p:sp>
     </p:spTree>
     <p:extLst>
       <p:ext uri="{BB962C8B-B14F-4D97-AF65-F5344CB8AC3E}">
-        <p14:creationId xmlns:p14="http://schemas.microsoft.com/office/powerpoint/2010/main" val="3555266232"/>
+        <p14:creationId xmlns:p14="http://schemas.microsoft.com/office/powerpoint/2010/main" val="3715049714"/>
       </p:ext>
     </p:extLst>
   </p:cSld>

--- a/Documentation/Slides/Week_21.pptx
+++ b/Documentation/Slides/Week_21.pptx
@@ -251,7 +251,7 @@
           <a:p>
             <a:fld id="{01926CF7-48D8-2F46-AFC8-8A5D2298DFDD}" type="datetimeFigureOut">
               <a:rPr lang="en-US" smtClean="0"/>
-              <a:t>2/9/26</a:t>
+              <a:t>2/10/26</a:t>
             </a:fld>
             <a:endParaRPr lang="en-US"/>
           </a:p>
@@ -16365,49 +16365,6 @@
 </file>
 
 <file path=customXml/item1.xml><?xml version="1.0" encoding="utf-8"?>
-<p:properties xmlns:p="http://schemas.microsoft.com/office/2006/metadata/properties" xmlns:xsi="http://www.w3.org/2001/XMLSchema-instance" xmlns:pc="http://schemas.microsoft.com/office/infopath/2007/PartnerControls">
-  <documentManagement>
-    <SharedWithUsers xmlns="d6656b4d-3fa0-4709-acfb-d5e813445d1e">
-      <UserInfo>
-        <DisplayName>Schott, Thomas H.</DisplayName>
-        <AccountId>17</AccountId>
-        <AccountType/>
-      </UserInfo>
-      <UserInfo>
-        <DisplayName>Sarault, Olivia M</DisplayName>
-        <AccountId>29</AccountId>
-        <AccountType/>
-      </UserInfo>
-      <UserInfo>
-        <DisplayName>Hiller, Kelly R</DisplayName>
-        <AccountId>98</AccountId>
-        <AccountType/>
-      </UserInfo>
-      <UserInfo>
-        <DisplayName>Eddy, Abigail Ellen</DisplayName>
-        <AccountId>46</AccountId>
-        <AccountType/>
-      </UserInfo>
-      <UserInfo>
-        <DisplayName>Gu, Yu Rain</DisplayName>
-        <AccountId>77</AccountId>
-        <AccountType/>
-      </UserInfo>
-      <UserInfo>
-        <DisplayName>Reese, Kristy S</DisplayName>
-        <AccountId>26</AccountId>
-        <AccountType/>
-      </UserInfo>
-    </SharedWithUsers>
-    <lcf76f155ced4ddcb4097134ff3c332f xmlns="37af3f4b-4b66-46f9-8456-831d9bc3e737">
-      <Terms xmlns="http://schemas.microsoft.com/office/infopath/2007/PartnerControls"/>
-    </lcf76f155ced4ddcb4097134ff3c332f>
-    <TaxCatchAll xmlns="d6656b4d-3fa0-4709-acfb-d5e813445d1e" xsi:nil="true"/>
-  </documentManagement>
-</p:properties>
-</file>
-
-<file path=customXml/item2.xml><?xml version="1.0" encoding="utf-8"?>
 <ct:contentTypeSchema xmlns:ct="http://schemas.microsoft.com/office/2006/metadata/contentType" xmlns:ma="http://schemas.microsoft.com/office/2006/metadata/properties/metaAttributes" ct:_="" ma:_="" ma:contentTypeName="Document" ma:contentTypeID="0x01010054E202481DC1CB46AA011D949D311478" ma:contentTypeVersion="13" ma:contentTypeDescription="Create a new document." ma:contentTypeScope="" ma:versionID="309c718596e4092f54ce9aa93358bb8d">
   <xsd:schema xmlns:xsd="http://www.w3.org/2001/XMLSchema" xmlns:xs="http://www.w3.org/2001/XMLSchema" xmlns:p="http://schemas.microsoft.com/office/2006/metadata/properties" xmlns:ns2="37af3f4b-4b66-46f9-8456-831d9bc3e737" xmlns:ns3="d6656b4d-3fa0-4709-acfb-d5e813445d1e" targetNamespace="http://schemas.microsoft.com/office/2006/metadata/properties" ma:root="true" ma:fieldsID="0c34f3e70276db9d2471c2526b8de3df" ns2:_="" ns3:_="">
     <xsd:import namespace="37af3f4b-4b66-46f9-8456-831d9bc3e737"/>
@@ -16630,6 +16587,49 @@
 </ct:contentTypeSchema>
 </file>
 
+<file path=customXml/item2.xml><?xml version="1.0" encoding="utf-8"?>
+<p:properties xmlns:p="http://schemas.microsoft.com/office/2006/metadata/properties" xmlns:xsi="http://www.w3.org/2001/XMLSchema-instance" xmlns:pc="http://schemas.microsoft.com/office/infopath/2007/PartnerControls">
+  <documentManagement>
+    <SharedWithUsers xmlns="d6656b4d-3fa0-4709-acfb-d5e813445d1e">
+      <UserInfo>
+        <DisplayName>Schott, Thomas H.</DisplayName>
+        <AccountId>17</AccountId>
+        <AccountType/>
+      </UserInfo>
+      <UserInfo>
+        <DisplayName>Sarault, Olivia M</DisplayName>
+        <AccountId>29</AccountId>
+        <AccountType/>
+      </UserInfo>
+      <UserInfo>
+        <DisplayName>Hiller, Kelly R</DisplayName>
+        <AccountId>98</AccountId>
+        <AccountType/>
+      </UserInfo>
+      <UserInfo>
+        <DisplayName>Eddy, Abigail Ellen</DisplayName>
+        <AccountId>46</AccountId>
+        <AccountType/>
+      </UserInfo>
+      <UserInfo>
+        <DisplayName>Gu, Yu Rain</DisplayName>
+        <AccountId>77</AccountId>
+        <AccountType/>
+      </UserInfo>
+      <UserInfo>
+        <DisplayName>Reese, Kristy S</DisplayName>
+        <AccountId>26</AccountId>
+        <AccountType/>
+      </UserInfo>
+    </SharedWithUsers>
+    <lcf76f155ced4ddcb4097134ff3c332f xmlns="37af3f4b-4b66-46f9-8456-831d9bc3e737">
+      <Terms xmlns="http://schemas.microsoft.com/office/infopath/2007/PartnerControls"/>
+    </lcf76f155ced4ddcb4097134ff3c332f>
+    <TaxCatchAll xmlns="d6656b4d-3fa0-4709-acfb-d5e813445d1e" xsi:nil="true"/>
+  </documentManagement>
+</p:properties>
+</file>
+
 <file path=customXml/item3.xml><?xml version="1.0" encoding="utf-8"?>
 <?mso-contentType ?>
 <FormTemplates xmlns="http://schemas.microsoft.com/sharepoint/v3/contenttype/forms">
@@ -16640,23 +16640,6 @@
 </file>
 
 <file path=customXml/itemProps1.xml><?xml version="1.0" encoding="utf-8"?>
-<ds:datastoreItem xmlns:ds="http://schemas.openxmlformats.org/officeDocument/2006/customXml" ds:itemID="{21DE0D6C-581B-4814-98E7-EF172D5D46A1}">
-  <ds:schemaRefs>
-    <ds:schemaRef ds:uri="http://purl.org/dc/elements/1.1/"/>
-    <ds:schemaRef ds:uri="http://schemas.microsoft.com/office/2006/documentManagement/types"/>
-    <ds:schemaRef ds:uri="d6656b4d-3fa0-4709-acfb-d5e813445d1e"/>
-    <ds:schemaRef ds:uri="http://purl.org/dc/terms/"/>
-    <ds:schemaRef ds:uri="http://schemas.microsoft.com/office/infopath/2007/PartnerControls"/>
-    <ds:schemaRef ds:uri="37af3f4b-4b66-46f9-8456-831d9bc3e737"/>
-    <ds:schemaRef ds:uri="http://schemas.openxmlformats.org/package/2006/metadata/core-properties"/>
-    <ds:schemaRef ds:uri="http://schemas.microsoft.com/office/2006/metadata/properties"/>
-    <ds:schemaRef ds:uri="http://www.w3.org/XML/1998/namespace"/>
-    <ds:schemaRef ds:uri="http://purl.org/dc/dcmitype/"/>
-  </ds:schemaRefs>
-</ds:datastoreItem>
-</file>
-
-<file path=customXml/itemProps2.xml><?xml version="1.0" encoding="utf-8"?>
 <ds:datastoreItem xmlns:ds="http://schemas.openxmlformats.org/officeDocument/2006/customXml" ds:itemID="{64D795B0-FAA0-424A-9B96-7691ED1EF26B}">
   <ds:schemaRefs>
     <ds:schemaRef ds:uri="http://schemas.microsoft.com/office/2006/metadata/contentType"/>
@@ -16675,6 +16658,23 @@
 </ds:datastoreItem>
 </file>
 
+<file path=customXml/itemProps2.xml><?xml version="1.0" encoding="utf-8"?>
+<ds:datastoreItem xmlns:ds="http://schemas.openxmlformats.org/officeDocument/2006/customXml" ds:itemID="{21DE0D6C-581B-4814-98E7-EF172D5D46A1}">
+  <ds:schemaRefs>
+    <ds:schemaRef ds:uri="http://purl.org/dc/elements/1.1/"/>
+    <ds:schemaRef ds:uri="http://schemas.microsoft.com/office/2006/documentManagement/types"/>
+    <ds:schemaRef ds:uri="d6656b4d-3fa0-4709-acfb-d5e813445d1e"/>
+    <ds:schemaRef ds:uri="http://purl.org/dc/terms/"/>
+    <ds:schemaRef ds:uri="http://schemas.microsoft.com/office/infopath/2007/PartnerControls"/>
+    <ds:schemaRef ds:uri="37af3f4b-4b66-46f9-8456-831d9bc3e737"/>
+    <ds:schemaRef ds:uri="http://schemas.openxmlformats.org/package/2006/metadata/core-properties"/>
+    <ds:schemaRef ds:uri="http://schemas.microsoft.com/office/2006/metadata/properties"/>
+    <ds:schemaRef ds:uri="http://www.w3.org/XML/1998/namespace"/>
+    <ds:schemaRef ds:uri="http://purl.org/dc/dcmitype/"/>
+  </ds:schemaRefs>
+</ds:datastoreItem>
+</file>
+
 <file path=customXml/itemProps3.xml><?xml version="1.0" encoding="utf-8"?>
 <ds:datastoreItem xmlns:ds="http://schemas.openxmlformats.org/officeDocument/2006/customXml" ds:itemID="{F5B64EEB-1B4A-4920-AA44-E234D7D487D1}">
   <ds:schemaRefs>

--- a/Documentation/Slides/Week_21.pptx
+++ b/Documentation/Slides/Week_21.pptx
@@ -251,7 +251,7 @@
           <a:p>
             <a:fld id="{01926CF7-48D8-2F46-AFC8-8A5D2298DFDD}" type="datetimeFigureOut">
               <a:rPr lang="en-US" smtClean="0"/>
-              <a:t>2/10/26</a:t>
+              <a:t>2/20/26</a:t>
             </a:fld>
             <a:endParaRPr lang="en-US"/>
           </a:p>
@@ -13719,14 +13719,11 @@
           <a:lstStyle/>
           <a:p>
             <a:r>
-              <a:rPr lang="en-US" b="1">
+              <a:rPr lang="en-US" b="1" dirty="0">
                 <a:latin typeface="Acumin Pro Condensed Semibold" panose="020B0506020202020204" pitchFamily="34" charset="77"/>
               </a:rPr>
-              <a:t>Week 6</a:t>
-            </a:r>
-            <a:endParaRPr lang="en-US" b="1" dirty="0">
-              <a:latin typeface="Acumin Pro Condensed Semibold" panose="020B0506020202020204" pitchFamily="34" charset="77"/>
-            </a:endParaRPr>
+              <a:t>Week 7</a:t>
+            </a:r>
           </a:p>
         </p:txBody>
       </p:sp>
@@ -13785,7 +13782,7 @@
           <a:p>
             <a:r>
               <a:rPr lang="en-US" dirty="0"/>
-              <a:t>02/09/26</a:t>
+              <a:t>02/20/26</a:t>
             </a:r>
           </a:p>
         </p:txBody>
@@ -16365,6 +16362,49 @@
 </file>
 
 <file path=customXml/item1.xml><?xml version="1.0" encoding="utf-8"?>
+<p:properties xmlns:p="http://schemas.microsoft.com/office/2006/metadata/properties" xmlns:xsi="http://www.w3.org/2001/XMLSchema-instance" xmlns:pc="http://schemas.microsoft.com/office/infopath/2007/PartnerControls">
+  <documentManagement>
+    <SharedWithUsers xmlns="d6656b4d-3fa0-4709-acfb-d5e813445d1e">
+      <UserInfo>
+        <DisplayName>Schott, Thomas H.</DisplayName>
+        <AccountId>17</AccountId>
+        <AccountType/>
+      </UserInfo>
+      <UserInfo>
+        <DisplayName>Sarault, Olivia M</DisplayName>
+        <AccountId>29</AccountId>
+        <AccountType/>
+      </UserInfo>
+      <UserInfo>
+        <DisplayName>Hiller, Kelly R</DisplayName>
+        <AccountId>98</AccountId>
+        <AccountType/>
+      </UserInfo>
+      <UserInfo>
+        <DisplayName>Eddy, Abigail Ellen</DisplayName>
+        <AccountId>46</AccountId>
+        <AccountType/>
+      </UserInfo>
+      <UserInfo>
+        <DisplayName>Gu, Yu Rain</DisplayName>
+        <AccountId>77</AccountId>
+        <AccountType/>
+      </UserInfo>
+      <UserInfo>
+        <DisplayName>Reese, Kristy S</DisplayName>
+        <AccountId>26</AccountId>
+        <AccountType/>
+      </UserInfo>
+    </SharedWithUsers>
+    <lcf76f155ced4ddcb4097134ff3c332f xmlns="37af3f4b-4b66-46f9-8456-831d9bc3e737">
+      <Terms xmlns="http://schemas.microsoft.com/office/infopath/2007/PartnerControls"/>
+    </lcf76f155ced4ddcb4097134ff3c332f>
+    <TaxCatchAll xmlns="d6656b4d-3fa0-4709-acfb-d5e813445d1e" xsi:nil="true"/>
+  </documentManagement>
+</p:properties>
+</file>
+
+<file path=customXml/item2.xml><?xml version="1.0" encoding="utf-8"?>
 <ct:contentTypeSchema xmlns:ct="http://schemas.microsoft.com/office/2006/metadata/contentType" xmlns:ma="http://schemas.microsoft.com/office/2006/metadata/properties/metaAttributes" ct:_="" ma:_="" ma:contentTypeName="Document" ma:contentTypeID="0x01010054E202481DC1CB46AA011D949D311478" ma:contentTypeVersion="13" ma:contentTypeDescription="Create a new document." ma:contentTypeScope="" ma:versionID="309c718596e4092f54ce9aa93358bb8d">
   <xsd:schema xmlns:xsd="http://www.w3.org/2001/XMLSchema" xmlns:xs="http://www.w3.org/2001/XMLSchema" xmlns:p="http://schemas.microsoft.com/office/2006/metadata/properties" xmlns:ns2="37af3f4b-4b66-46f9-8456-831d9bc3e737" xmlns:ns3="d6656b4d-3fa0-4709-acfb-d5e813445d1e" targetNamespace="http://schemas.microsoft.com/office/2006/metadata/properties" ma:root="true" ma:fieldsID="0c34f3e70276db9d2471c2526b8de3df" ns2:_="" ns3:_="">
     <xsd:import namespace="37af3f4b-4b66-46f9-8456-831d9bc3e737"/>
@@ -16587,49 +16627,6 @@
 </ct:contentTypeSchema>
 </file>
 
-<file path=customXml/item2.xml><?xml version="1.0" encoding="utf-8"?>
-<p:properties xmlns:p="http://schemas.microsoft.com/office/2006/metadata/properties" xmlns:xsi="http://www.w3.org/2001/XMLSchema-instance" xmlns:pc="http://schemas.microsoft.com/office/infopath/2007/PartnerControls">
-  <documentManagement>
-    <SharedWithUsers xmlns="d6656b4d-3fa0-4709-acfb-d5e813445d1e">
-      <UserInfo>
-        <DisplayName>Schott, Thomas H.</DisplayName>
-        <AccountId>17</AccountId>
-        <AccountType/>
-      </UserInfo>
-      <UserInfo>
-        <DisplayName>Sarault, Olivia M</DisplayName>
-        <AccountId>29</AccountId>
-        <AccountType/>
-      </UserInfo>
-      <UserInfo>
-        <DisplayName>Hiller, Kelly R</DisplayName>
-        <AccountId>98</AccountId>
-        <AccountType/>
-      </UserInfo>
-      <UserInfo>
-        <DisplayName>Eddy, Abigail Ellen</DisplayName>
-        <AccountId>46</AccountId>
-        <AccountType/>
-      </UserInfo>
-      <UserInfo>
-        <DisplayName>Gu, Yu Rain</DisplayName>
-        <AccountId>77</AccountId>
-        <AccountType/>
-      </UserInfo>
-      <UserInfo>
-        <DisplayName>Reese, Kristy S</DisplayName>
-        <AccountId>26</AccountId>
-        <AccountType/>
-      </UserInfo>
-    </SharedWithUsers>
-    <lcf76f155ced4ddcb4097134ff3c332f xmlns="37af3f4b-4b66-46f9-8456-831d9bc3e737">
-      <Terms xmlns="http://schemas.microsoft.com/office/infopath/2007/PartnerControls"/>
-    </lcf76f155ced4ddcb4097134ff3c332f>
-    <TaxCatchAll xmlns="d6656b4d-3fa0-4709-acfb-d5e813445d1e" xsi:nil="true"/>
-  </documentManagement>
-</p:properties>
-</file>
-
 <file path=customXml/item3.xml><?xml version="1.0" encoding="utf-8"?>
 <?mso-contentType ?>
 <FormTemplates xmlns="http://schemas.microsoft.com/sharepoint/v3/contenttype/forms">
@@ -16640,6 +16637,23 @@
 </file>
 
 <file path=customXml/itemProps1.xml><?xml version="1.0" encoding="utf-8"?>
+<ds:datastoreItem xmlns:ds="http://schemas.openxmlformats.org/officeDocument/2006/customXml" ds:itemID="{21DE0D6C-581B-4814-98E7-EF172D5D46A1}">
+  <ds:schemaRefs>
+    <ds:schemaRef ds:uri="http://purl.org/dc/elements/1.1/"/>
+    <ds:schemaRef ds:uri="http://schemas.microsoft.com/office/2006/documentManagement/types"/>
+    <ds:schemaRef ds:uri="d6656b4d-3fa0-4709-acfb-d5e813445d1e"/>
+    <ds:schemaRef ds:uri="http://purl.org/dc/terms/"/>
+    <ds:schemaRef ds:uri="http://schemas.microsoft.com/office/infopath/2007/PartnerControls"/>
+    <ds:schemaRef ds:uri="37af3f4b-4b66-46f9-8456-831d9bc3e737"/>
+    <ds:schemaRef ds:uri="http://schemas.openxmlformats.org/package/2006/metadata/core-properties"/>
+    <ds:schemaRef ds:uri="http://schemas.microsoft.com/office/2006/metadata/properties"/>
+    <ds:schemaRef ds:uri="http://www.w3.org/XML/1998/namespace"/>
+    <ds:schemaRef ds:uri="http://purl.org/dc/dcmitype/"/>
+  </ds:schemaRefs>
+</ds:datastoreItem>
+</file>
+
+<file path=customXml/itemProps2.xml><?xml version="1.0" encoding="utf-8"?>
 <ds:datastoreItem xmlns:ds="http://schemas.openxmlformats.org/officeDocument/2006/customXml" ds:itemID="{64D795B0-FAA0-424A-9B96-7691ED1EF26B}">
   <ds:schemaRefs>
     <ds:schemaRef ds:uri="http://schemas.microsoft.com/office/2006/metadata/contentType"/>
@@ -16658,23 +16672,6 @@
 </ds:datastoreItem>
 </file>
 
-<file path=customXml/itemProps2.xml><?xml version="1.0" encoding="utf-8"?>
-<ds:datastoreItem xmlns:ds="http://schemas.openxmlformats.org/officeDocument/2006/customXml" ds:itemID="{21DE0D6C-581B-4814-98E7-EF172D5D46A1}">
-  <ds:schemaRefs>
-    <ds:schemaRef ds:uri="http://purl.org/dc/elements/1.1/"/>
-    <ds:schemaRef ds:uri="http://schemas.microsoft.com/office/2006/documentManagement/types"/>
-    <ds:schemaRef ds:uri="d6656b4d-3fa0-4709-acfb-d5e813445d1e"/>
-    <ds:schemaRef ds:uri="http://purl.org/dc/terms/"/>
-    <ds:schemaRef ds:uri="http://schemas.microsoft.com/office/infopath/2007/PartnerControls"/>
-    <ds:schemaRef ds:uri="37af3f4b-4b66-46f9-8456-831d9bc3e737"/>
-    <ds:schemaRef ds:uri="http://schemas.openxmlformats.org/package/2006/metadata/core-properties"/>
-    <ds:schemaRef ds:uri="http://schemas.microsoft.com/office/2006/metadata/properties"/>
-    <ds:schemaRef ds:uri="http://www.w3.org/XML/1998/namespace"/>
-    <ds:schemaRef ds:uri="http://purl.org/dc/dcmitype/"/>
-  </ds:schemaRefs>
-</ds:datastoreItem>
-</file>
-
 <file path=customXml/itemProps3.xml><?xml version="1.0" encoding="utf-8"?>
 <ds:datastoreItem xmlns:ds="http://schemas.openxmlformats.org/officeDocument/2006/customXml" ds:itemID="{F5B64EEB-1B4A-4920-AA44-E234D7D487D1}">
   <ds:schemaRefs>
